--- a/Korsik_presentation.pptx
+++ b/Korsik_presentation.pptx
@@ -115,12 +115,12 @@
   <p:extLst>
     <p:ext uri="{521415D9-36F7-43E2-AB2F-B90AF26B5E84}">
       <p14:sectionLst xmlns:p14="http://schemas.microsoft.com/office/powerpoint/2010/main">
-        <p14:section name="Открытие" id="{ed89ff43-0395-2b85-de1a-8a394087ec0b}">
+        <p14:section name="Открытие" id="{dbcee14a-e62b-6190-8062-75631b1242ac}">
           <p14:sldIdLst>
             <p14:sldId id="256"/>
           </p14:sldIdLst>
         </p14:section>
-        <p14:section name="Решение" id="{c0447bf0-b860-35f2-a459-55b8c051d4a0}">
+        <p14:section name="Решение" id="{6a2f2ba6-ffee-b17e-34ee-d5380ab09292}">
           <p14:sldIdLst>
             <p14:sldId id="257"/>
             <p14:sldId id="258"/>
@@ -130,12 +130,12 @@
             <p14:sldId id="262"/>
           </p14:sldIdLst>
         </p14:section>
-        <p14:section name="Итог" id="{047710c7-e613-6886-2f7d-ada6c73b5f5f}">
+        <p14:section name="Итог" id="{c9627d39-8d12-3749-c3a0-64a334d263e6}">
           <p14:sldIdLst>
             <p14:sldId id="263"/>
           </p14:sldIdLst>
         </p14:section>
-        <p14:section name="Финал" id="{42652e32-2227-34cd-3496-07a1fdbe9b67}">
+        <p14:section name="Финал" id="{9e5f1117-ee0f-2bee-51af-e8d182dd169f}">
           <p14:sldIdLst>
             <p14:sldId id="264"/>
           </p14:sldIdLst>
@@ -968,7 +968,7 @@
           <a:p>
             <a:r>
               <a:rPr lang="en-US" dirty="0"/>
-              <a:t>[0:30–0:45] Это работающий прототип: шесть сервисов в Docker. Бот подключён к МАКС, планировщик ведёт сотрудника по 21 этапу сценария из ТЗ. Регламенты проходят OCR и попадают в векторную базу, все данные — в PostgreSQL. Модель подключена через шлюз — провайдера можно сменить настройкой, в том числе на собственный сервер. 320 автотестов на настоящей базе.</a:t>
+              <a:t>[0:30–0:45] Это работающий прототип: шесть сервисов в Docker. Бот подключён к МАКС, планировщик ведёт сотрудника по 21 этапу сценария из ТЗ. Регламенты проходят OCR и попадают в векторную базу, все данные — в PostgreSQL. Модель подключена через шлюз — провайдера можно сменить настройкой, в том числе на собственный сервер. 340 автотестов на настоящей базе.</a:t>
             </a:r>
             <a:endParaRPr lang="en-US" dirty="0"/>
           </a:p>
@@ -1056,7 +1056,7 @@
           <a:p>
             <a:r>
               <a:rPr lang="en-US" dirty="0"/>
-              <a:t>[0:45–1:10] Что видит новичок: сообщения по таймлайну — от знакомства до конца испытательного срока, с учётом площадки и «ты/вы». И он может спросить своими словами: агент отвечает только по найденным фрагментам регламентов и называет источник. Если ответа нет — Корсик ничего не пишет в чат, а вопрос сразу и без кнопок попадает HR в панель; ответ человека потом приходит в тот же чат. Если вопрос про конфликт или зарплату — отвечает и тоже сразу передаёт HR.</a:t>
+              <a:t>[0:45–1:10] Что видит новичок: сообщения по таймлайну — от знакомства до конца испытательного срока, с учётом площадки и «ты/вы». И он может спросить своими словами: агент отвечает только по найденным фрагментам регламентов и называет источник. Если ответа нет — Корсик ничего не пишет в чат, а вопрос сразу попадает HR прямо в МАКС: сообщение с кнопками «Ответить», «Взять в работу», «Закрыть». HR отвечает оттуда же, ответ приходит сотруднику в тот же чат, и пока HR на связи, бот не вмешивается, а пересылает сообщения сотрудника HR. Если вопрос про конфликт или зарплату — отвечает и тоже сразу передаёт HR.</a:t>
             </a:r>
             <a:endParaRPr lang="en-US" dirty="0"/>
           </a:p>
@@ -1499,7 +1499,7 @@
               <a:t>[2:40–3:00] Корсик берёт на себя рутину, а HR остаётся с людьми. Спасибо! Готовы ответить на вопросы.
 --- ЕСЛИ СПРОСЯТ ---
 • Галлюцинации: порог релевантности поиска 0,5; факты — только из найденных фрагментов; нет ответа — в чат ничего, вопрос сразу уходит HR (бесшовная эскалация); кадровые и юридические вопросы — ответ и мгновенная передача HR. Технический сбой — не «не знаю»: бот пишет о неполадках, обращение не создаётся.
-• Бот молчит — не страшно? Вопрос виден HR в панели сразу; ответ приходит в тот же чат; опционально можно включить нейтральное «Передал вопрос коллегам».
+• Бот молчит — не страшно? HR получает вопрос в МАКС сразу, отвечает кнопкой в том же мессенджере; если HR молчит 12 часов или обращение закрыто, бот возвращается к ответам; опционально можно включить нейтральное «Передал вопрос коллегам».
 • Светофор: красный — высокий риск (индекс 50+) или сбой доставки; жёлтый — средний риск (25–49), пропуск этапа, этап ждёт отправки, вопрос без ответа больше суток, не привязан к боту перед выходом; зелёный — по плану; серый — ещё не подключён.
 • Красные флаги: сообщение с красным флагом автоматически создаёт обращение для HR (по требованию кейса); остальные обращения тоже создаются автоматически, без кнопок.
 • Данные и безопасность: модель подключается через шлюз — можно развернуть свою (любой OpenAI-совместимый endpoint); роли в панели, пароли — scrypt; руководитель видит только своих подчинённых; интерфейс проверен на XSS, вебхук принимает события только с секретом, контейнеры не от root.
@@ -4914,7 +4914,7 @@
       </p:sp>
       <p:sp>
         <p:nvSpPr>
-          <p:cNvPr id="49" name="Stat card 320"/>
+          <p:cNvPr id="49" name="Stat card 340"/>
           <p:cNvSpPr/>
           <p:nvPr/>
         </p:nvSpPr>
@@ -4948,7 +4948,7 @@
       </p:sp>
       <p:sp>
         <p:nvSpPr>
-          <p:cNvPr id="50" name="Stat 320"/>
+          <p:cNvPr id="50" name="Stat 340"/>
           <p:cNvSpPr txBox="1"/>
           <p:nvPr/>
         </p:nvSpPr>
@@ -4979,7 +4979,7 @@
                 <a:ea typeface="Arial" pitchFamily="34" charset="-122"/>
                 <a:cs typeface="Arial" pitchFamily="34" charset="-120"/>
               </a:rPr>
-              <a:t>320</a:t>
+              <a:t>340</a:t>
             </a:r>
             <a:endParaRPr lang="en-US" sz="4000" dirty="0"/>
           </a:p>
@@ -4987,7 +4987,7 @@
       </p:sp>
       <p:sp>
         <p:nvSpPr>
-          <p:cNvPr id="51" name="Stat label 320"/>
+          <p:cNvPr id="51" name="Stat label 340"/>
           <p:cNvSpPr txBox="1"/>
           <p:nvPr/>
         </p:nvSpPr>
@@ -5582,7 +5582,7 @@
                   <a:schemeClr val="accent1"/>
                 </a:solidFill>
               </a:rPr>
-              <a:t>Панель HR · Эскалации</a:t>
+              <a:t>HR в МАКС · 🔔 Новое обращение №12</a:t>
             </a:r>
             <a:endParaRPr lang="en-US" sz="1200" dirty="0"/>
           </a:p>
@@ -5596,7 +5596,7 @@
                   <a:schemeClr val="bg1"/>
                 </a:solidFill>
               </a:rPr>
-              <a:t>Нет ответа в базе — передано автоматически: «Какой пароль от wifi?»</a:t>
+              <a:t>«Какой пароль от wifi?»   [Ответить]  [Взять в работу]</a:t>
             </a:r>
             <a:endParaRPr lang="en-US" sz="1200" dirty="0"/>
           </a:p>
@@ -5959,7 +5959,7 @@
                   <a:schemeClr val="tx1"/>
                 </a:solidFill>
               </a:rPr>
-              <a:t>Нет ответа в базе — Корсик молчит, вопрос сразу у HR. Личный или тревожный вопрос: ответ и мгновенная передача</a:t>
+              <a:t>Нет ответа в базе — Корсик молчит, HR получает вопрос в МАКС и отвечает кнопкой. Пока HR на связи, бот не вмешивается</a:t>
             </a:r>
             <a:endParaRPr lang="en-US" sz="1400" dirty="0"/>
           </a:p>
@@ -7980,7 +7980,7 @@
                   <a:schemeClr val="tx1"/>
                 </a:solidFill>
               </a:rPr>
-              <a:t>Не знает ответа — молчит, а вопрос сразу у HR; ответ человека приходит в тот же чат в МАКС</a:t>
+              <a:t>Не знает ответа — молчит, а вопрос сразу у HR в МАКС; HR отвечает кнопкой, ответ приходит в тот же чат</a:t>
             </a:r>
             <a:endParaRPr lang="en-US" sz="1400" dirty="0"/>
           </a:p>
